--- a/public/retrieval-concept-map-template.pptx
+++ b/public/retrieval-concept-map-template.pptx
@@ -2,13 +2,13 @@
 <file path=ppt/presentation.xml><?xml version="1.0" encoding="utf-8"?>
 <p:presentation xmlns:p="http://schemas.openxmlformats.org/presentationml/2006/main">
   <p:sldMasterIdLst>
-    <p:sldMasterId xmlns:r="http://schemas.openxmlformats.org/officeDocument/2006/relationships" id="2147483648" r:id="Rcfc9b97f259d4136"/>
+    <p:sldMasterId xmlns:r="http://schemas.openxmlformats.org/officeDocument/2006/relationships" id="2147483648" r:id="R8c324f5ed53440e9"/>
   </p:sldMasterIdLst>
   <p:notesMasterIdLst>
-    <p:notesMasterId xmlns:r="http://schemas.openxmlformats.org/officeDocument/2006/relationships" r:id="Rf831aa2cd005497e"/>
+    <p:notesMasterId xmlns:r="http://schemas.openxmlformats.org/officeDocument/2006/relationships" r:id="R9cb9b636608e495b"/>
   </p:notesMasterIdLst>
   <p:sldIdLst>
-    <p:sldId xmlns:r="http://schemas.openxmlformats.org/officeDocument/2006/relationships" id="256" r:id="R54a476ed19b94050"/>
+    <p:sldId xmlns:r="http://schemas.openxmlformats.org/officeDocument/2006/relationships" id="256" r:id="Rda5eb00e763a44a9"/>
   </p:sldIdLst>
   <p:sldSz cx="12192000" cy="6858000"/>
   <p:notesSz cx="6858000" cy="9144000"/>
@@ -442,7 +442,7 @@
           <a:lstStyle xmlns:a="http://schemas.openxmlformats.org/drawingml/2006/main"/>
           <a:p xmlns:a="http://schemas.openxmlformats.org/drawingml/2006/main">
             <a:r>
-              <a:t>Teacher setup: Replace bracketed text before teaching. Every text box is editable. Duplicate the slide for checked answers or a second prompt. Keep prompt and answer sides separate when printing cards.</a:t>
+              <a:t>Teacher setup: Replace bracketed text before teaching. All text and shapes are editable. Duplicate the slide for answers or another prompt. For card activities, separate prompt and answer sides before printing.</a:t>
             </a:r>
           </a:p>
           <a:p xmlns:a="http://schemas.openxmlformats.org/drawingml/2006/main">
@@ -452,17 +452,12 @@
           </a:p>
           <a:p xmlns:a="http://schemas.openxmlformats.org/drawingml/2006/main">
             <a:r>
-              <a:t>Activity: Concept map from memory</a:t>
-            </a:r>
-          </a:p>
-          <a:p xmlns:a="http://schemas.openxmlformats.org/drawingml/2006/main">
-            <a:r>
               <a:t>Materials: Blank paper</a:t>
             </a:r>
           </a:p>
           <a:p xmlns:a="http://schemas.openxmlformats.org/drawingml/2006/main">
             <a:r>
-              <a:t>Suggested total time including feedback: 10 minutes.</a:t>
+              <a:t>Suggested time including feedback: 10 minutes.</a:t>
             </a:r>
           </a:p>
           <a:p xmlns:a="http://schemas.openxmlformats.org/drawingml/2006/main">
@@ -505,26 +500,6 @@
               <a:t>Adapt: Provide a few category headings without supplying all the facts.</a:t>
             </a:r>
           </a:p>
-          <a:p xmlns:a="http://schemas.openxmlformats.org/drawingml/2006/main">
-            <a:r>
-              <a:t>Credit: Shared concept-mapping method; TNT retrieval adaptation</a:t>
-            </a:r>
-          </a:p>
-          <a:p xmlns:a="http://schemas.openxmlformats.org/drawingml/2006/main">
-            <a:r>
-              <a:t>No sole creator is claimed for this memory-first classroom variant. Karpicke and Blunt (2011) provide related research on retrieval and concept mapping, not proof that every map format is superior.</a:t>
-            </a:r>
-          </a:p>
-          <a:p xmlns:a="http://schemas.openxmlformats.org/drawingml/2006/main">
-            <a:r>
-              <a:t>Source: https://doi.org/10.1126/science.1199327</a:t>
-            </a:r>
-          </a:p>
-          <a:p xmlns:a="http://schemas.openxmlformats.org/drawingml/2006/main">
-            <a:r>
-              <a:t>Full guide: https://tnt-teaching-tools.github.io/cold-call-classroom/retrieval-concept-map.html</a:t>
-            </a:r>
-          </a:p>
         </p:txBody>
       </p:sp>
       <p:sp>
@@ -569,7 +544,7 @@
           <p:cNvPr id="4" name="Accent rule">
             <a:extLst xmlns:a="http://schemas.openxmlformats.org/drawingml/2006/main">
               <a:ext uri="{FF2B5EF4-FFF2-40B4-BE49-F238E27FC236}">
-                <a16:creationId xmlns:a16="http://schemas.microsoft.com/office/drawing/2014/main" id="{EE94A15E-6A04-41A0-970D-1326A72A4A63}"/>
+                <a16:creationId xmlns:a16="http://schemas.microsoft.com/office/drawing/2014/main" id="{A890E4C6-1EA3-4DDE-AA5D-9B613C7AF079}"/>
               </a:ext>
             </a:extLst>
           </p:cNvPr>
@@ -600,7 +575,7 @@
           <p:cNvPr id="2" name="Title">
             <a:extLst xmlns:a="http://schemas.openxmlformats.org/drawingml/2006/main">
               <a:ext uri="{FF2B5EF4-FFF2-40B4-BE49-F238E27FC236}">
-                <a16:creationId xmlns:a16="http://schemas.microsoft.com/office/drawing/2014/main" id="{D28F1AA5-8F16-4346-8CDE-4C8D177AD4E6}"/>
+                <a16:creationId xmlns:a16="http://schemas.microsoft.com/office/drawing/2014/main" id="{11691FCB-0E4D-4F13-8C18-6E6FE8E93D36}"/>
               </a:ext>
             </a:extLst>
           </p:cNvPr>
@@ -747,7 +722,7 @@
           <p:cNvPr id="3" name="Subtitle">
             <a:extLst xmlns:a="http://schemas.openxmlformats.org/drawingml/2006/main">
               <a:ext uri="{FF2B5EF4-FFF2-40B4-BE49-F238E27FC236}">
-                <a16:creationId xmlns:a16="http://schemas.microsoft.com/office/drawing/2014/main" id="{4D6963CF-5CB3-412B-B7A6-D8CDAD722917}"/>
+                <a16:creationId xmlns:a16="http://schemas.microsoft.com/office/drawing/2014/main" id="{017AA032-3E05-47EA-9746-6CA47CE48530}"/>
               </a:ext>
             </a:extLst>
           </p:cNvPr>
@@ -911,7 +886,7 @@
           <p:cNvPr id="3" name="Accent rule">
             <a:extLst xmlns:a="http://schemas.openxmlformats.org/drawingml/2006/main">
               <a:ext uri="{FF2B5EF4-FFF2-40B4-BE49-F238E27FC236}">
-                <a16:creationId xmlns:a16="http://schemas.microsoft.com/office/drawing/2014/main" id="{92931CFA-960A-4F30-A3D6-ECDD85549E4C}"/>
+                <a16:creationId xmlns:a16="http://schemas.microsoft.com/office/drawing/2014/main" id="{FD5ADF32-1649-4078-985B-3A0FF19D1A74}"/>
               </a:ext>
             </a:extLst>
           </p:cNvPr>
@@ -942,7 +917,7 @@
           <p:cNvPr id="2" name="Section title">
             <a:extLst xmlns:a="http://schemas.openxmlformats.org/drawingml/2006/main">
               <a:ext uri="{FF2B5EF4-FFF2-40B4-BE49-F238E27FC236}">
-                <a16:creationId xmlns:a16="http://schemas.microsoft.com/office/drawing/2014/main" id="{A992722E-441A-401F-BEE1-F5C60EE0E069}"/>
+                <a16:creationId xmlns:a16="http://schemas.microsoft.com/office/drawing/2014/main" id="{09B50718-91C5-4FB4-90C2-6F30ACDF5A3D}"/>
               </a:ext>
             </a:extLst>
           </p:cNvPr>
@@ -1106,7 +1081,7 @@
           <p:cNvPr id="4" name="Accent rule">
             <a:extLst xmlns:a="http://schemas.openxmlformats.org/drawingml/2006/main">
               <a:ext uri="{FF2B5EF4-FFF2-40B4-BE49-F238E27FC236}">
-                <a16:creationId xmlns:a16="http://schemas.microsoft.com/office/drawing/2014/main" id="{34BC820B-0649-4D58-9688-93AF0D098ED4}"/>
+                <a16:creationId xmlns:a16="http://schemas.microsoft.com/office/drawing/2014/main" id="{03C2A0AE-2663-4661-9E5E-0D3DC884A0EA}"/>
               </a:ext>
             </a:extLst>
           </p:cNvPr>
@@ -1137,7 +1112,7 @@
           <p:cNvPr id="2" name="Title">
             <a:extLst xmlns:a="http://schemas.openxmlformats.org/drawingml/2006/main">
               <a:ext uri="{FF2B5EF4-FFF2-40B4-BE49-F238E27FC236}">
-                <a16:creationId xmlns:a16="http://schemas.microsoft.com/office/drawing/2014/main" id="{679C56ED-FBCD-4588-9936-86DA70780EC1}"/>
+                <a16:creationId xmlns:a16="http://schemas.microsoft.com/office/drawing/2014/main" id="{AA3B2221-F13B-4D5A-86B5-14B7592B07F2}"/>
               </a:ext>
             </a:extLst>
           </p:cNvPr>
@@ -1284,7 +1259,7 @@
           <p:cNvPr id="3" name="Body">
             <a:extLst xmlns:a="http://schemas.openxmlformats.org/drawingml/2006/main">
               <a:ext uri="{FF2B5EF4-FFF2-40B4-BE49-F238E27FC236}">
-                <a16:creationId xmlns:a16="http://schemas.microsoft.com/office/drawing/2014/main" id="{5CFA49FC-138B-4AD8-95FD-A4E7F4D66202}"/>
+                <a16:creationId xmlns:a16="http://schemas.microsoft.com/office/drawing/2014/main" id="{C394DDB4-873D-4E82-9AB6-DDC570D3AA56}"/>
               </a:ext>
             </a:extLst>
           </p:cNvPr>
@@ -1448,7 +1423,7 @@
           <p:cNvPr id="5" name="Accent rule">
             <a:extLst xmlns:a="http://schemas.openxmlformats.org/drawingml/2006/main">
               <a:ext uri="{FF2B5EF4-FFF2-40B4-BE49-F238E27FC236}">
-                <a16:creationId xmlns:a16="http://schemas.microsoft.com/office/drawing/2014/main" id="{E4403E5D-2819-4E97-B58A-3178494614B8}"/>
+                <a16:creationId xmlns:a16="http://schemas.microsoft.com/office/drawing/2014/main" id="{C80138DF-C02C-4821-8BCB-ED97DD068106}"/>
               </a:ext>
             </a:extLst>
           </p:cNvPr>
@@ -1479,7 +1454,7 @@
           <p:cNvPr id="2" name="Title">
             <a:extLst xmlns:a="http://schemas.openxmlformats.org/drawingml/2006/main">
               <a:ext uri="{FF2B5EF4-FFF2-40B4-BE49-F238E27FC236}">
-                <a16:creationId xmlns:a16="http://schemas.microsoft.com/office/drawing/2014/main" id="{43CB3ED7-D507-4904-BBEC-39A09D87FF62}"/>
+                <a16:creationId xmlns:a16="http://schemas.microsoft.com/office/drawing/2014/main" id="{45A8DF69-1434-4146-9D92-6155B9C66252}"/>
               </a:ext>
             </a:extLst>
           </p:cNvPr>
@@ -1626,7 +1601,7 @@
           <p:cNvPr id="3" name="Left column">
             <a:extLst xmlns:a="http://schemas.openxmlformats.org/drawingml/2006/main">
               <a:ext uri="{FF2B5EF4-FFF2-40B4-BE49-F238E27FC236}">
-                <a16:creationId xmlns:a16="http://schemas.microsoft.com/office/drawing/2014/main" id="{D19C6CFC-F8D1-486C-9147-0001F8339881}"/>
+                <a16:creationId xmlns:a16="http://schemas.microsoft.com/office/drawing/2014/main" id="{05677679-1966-460C-81CF-04EF755C29FA}"/>
               </a:ext>
             </a:extLst>
           </p:cNvPr>
@@ -1773,7 +1748,7 @@
           <p:cNvPr id="4" name="Right column">
             <a:extLst xmlns:a="http://schemas.openxmlformats.org/drawingml/2006/main">
               <a:ext uri="{FF2B5EF4-FFF2-40B4-BE49-F238E27FC236}">
-                <a16:creationId xmlns:a16="http://schemas.microsoft.com/office/drawing/2014/main" id="{48466D7C-C740-4AF9-BAC9-C8F055B0FBAF}"/>
+                <a16:creationId xmlns:a16="http://schemas.microsoft.com/office/drawing/2014/main" id="{9BE1602D-F530-45B1-B1D8-2D189D9E1F72}"/>
               </a:ext>
             </a:extLst>
           </p:cNvPr>
@@ -1937,7 +1912,7 @@
           <p:cNvPr id="4" name="Accent rule">
             <a:extLst xmlns:a="http://schemas.openxmlformats.org/drawingml/2006/main">
               <a:ext uri="{FF2B5EF4-FFF2-40B4-BE49-F238E27FC236}">
-                <a16:creationId xmlns:a16="http://schemas.microsoft.com/office/drawing/2014/main" id="{99ECEEBD-412A-401F-930D-67EB687383E2}"/>
+                <a16:creationId xmlns:a16="http://schemas.microsoft.com/office/drawing/2014/main" id="{28464085-1AB7-4BD3-AFFF-EACF07C7B3F1}"/>
               </a:ext>
             </a:extLst>
           </p:cNvPr>
@@ -1968,7 +1943,7 @@
           <p:cNvPr id="2" name="Title">
             <a:extLst xmlns:a="http://schemas.openxmlformats.org/drawingml/2006/main">
               <a:ext uri="{FF2B5EF4-FFF2-40B4-BE49-F238E27FC236}">
-                <a16:creationId xmlns:a16="http://schemas.microsoft.com/office/drawing/2014/main" id="{1D940C2B-AE60-4FC1-A5F1-B8038CF81DE9}"/>
+                <a16:creationId xmlns:a16="http://schemas.microsoft.com/office/drawing/2014/main" id="{B021274E-BE0A-483E-BC09-CCB88509D6BE}"/>
               </a:ext>
             </a:extLst>
           </p:cNvPr>
@@ -2115,7 +2090,7 @@
           <p:cNvPr id="3" name="Left column">
             <a:extLst xmlns:a="http://schemas.openxmlformats.org/drawingml/2006/main">
               <a:ext uri="{FF2B5EF4-FFF2-40B4-BE49-F238E27FC236}">
-                <a16:creationId xmlns:a16="http://schemas.microsoft.com/office/drawing/2014/main" id="{0E810FE4-D607-4736-B90A-674D5039F1A3}"/>
+                <a16:creationId xmlns:a16="http://schemas.microsoft.com/office/drawing/2014/main" id="{BF4B663B-CB0F-411E-98BF-8135B09B4DBC}"/>
               </a:ext>
             </a:extLst>
           </p:cNvPr>
@@ -2300,12 +2275,12 @@
   </p:cSld>
   <p:clrMap bg1="lt1" tx1="dk1" bg2="lt2" tx2="dk2" accent1="accent1" accent2="accent2" accent3="accent3" accent4="accent4" accent5="accent5" accent6="accent6" hlink="hlink" folHlink="folHlink"/>
   <p:sldLayoutIdLst>
-    <p:sldLayoutId xmlns:r="http://schemas.openxmlformats.org/officeDocument/2006/relationships" id="2147483649" r:id="R79613c6ce17b4ced"/>
-    <p:sldLayoutId xmlns:r="http://schemas.openxmlformats.org/officeDocument/2006/relationships" id="2147483650" r:id="R9e8b45b976804c19"/>
-    <p:sldLayoutId xmlns:r="http://schemas.openxmlformats.org/officeDocument/2006/relationships" id="2147483651" r:id="R01d25ecdf6ac45e5"/>
-    <p:sldLayoutId xmlns:r="http://schemas.openxmlformats.org/officeDocument/2006/relationships" id="2147483652" r:id="R5d195189e3244864"/>
-    <p:sldLayoutId xmlns:r="http://schemas.openxmlformats.org/officeDocument/2006/relationships" id="2147483653" r:id="R0e3e131beacc41df"/>
-    <p:sldLayoutId xmlns:r="http://schemas.openxmlformats.org/officeDocument/2006/relationships" id="2147483654" r:id="R0da4c5809b1e4811"/>
+    <p:sldLayoutId xmlns:r="http://schemas.openxmlformats.org/officeDocument/2006/relationships" id="2147483649" r:id="Rd9ca92eb03c44fc8"/>
+    <p:sldLayoutId xmlns:r="http://schemas.openxmlformats.org/officeDocument/2006/relationships" id="2147483650" r:id="R507f8de5c9db4dac"/>
+    <p:sldLayoutId xmlns:r="http://schemas.openxmlformats.org/officeDocument/2006/relationships" id="2147483651" r:id="R33234b4ab5c94e34"/>
+    <p:sldLayoutId xmlns:r="http://schemas.openxmlformats.org/officeDocument/2006/relationships" id="2147483652" r:id="R53323cdb0c744835"/>
+    <p:sldLayoutId xmlns:r="http://schemas.openxmlformats.org/officeDocument/2006/relationships" id="2147483653" r:id="R21adcb0abb194737"/>
+    <p:sldLayoutId xmlns:r="http://schemas.openxmlformats.org/officeDocument/2006/relationships" id="2147483654" r:id="R276e6cdfba7342de"/>
   </p:sldLayoutIdLst>
   <p:txStyles>
     <p:titleStyle>
@@ -2838,7 +2813,7 @@
     <p:bg>
       <p:bgPr>
         <a:solidFill xmlns:a="http://schemas.openxmlformats.org/drawingml/2006/main">
-          <a:srgbClr val="FFFCF2"/>
+          <a:srgbClr val="FFFDF5"/>
         </a:solidFill>
       </p:bgPr>
     </p:bg>
@@ -2853,10 +2828,10 @@
       </p:grpSpPr>
       <p:sp>
         <p:nvSpPr>
-          <p:cNvPr id="12" name="">
+          <p:cNvPr id="24" name="">
             <a:extLst xmlns:a="http://schemas.openxmlformats.org/drawingml/2006/main">
               <a:ext uri="{FF2B5EF4-FFF2-40B4-BE49-F238E27FC236}">
-                <a16:creationId xmlns:a16="http://schemas.microsoft.com/office/drawing/2014/main" id="{E0D14F39-B1B9-49CC-83EC-E50E1C379FEE}"/>
+                <a16:creationId xmlns:a16="http://schemas.microsoft.com/office/drawing/2014/main" id="{D0866C07-3130-428D-BB7B-477B4C73FE4C}"/>
               </a:ext>
             </a:extLst>
           </p:cNvPr>
@@ -2867,8 +2842,8 @@
         </p:nvSpPr>
         <p:spPr>
           <a:xfrm xmlns:a="http://schemas.openxmlformats.org/drawingml/2006/main">
-            <a:off x="609600" y="333375"/>
-            <a:ext cx="10972800" cy="714375"/>
+            <a:off x="609600" y="323850"/>
+            <a:ext cx="10972800" cy="666750"/>
           </a:xfrm>
           <a:prstGeom xmlns:a="http://schemas.openxmlformats.org/drawingml/2006/main" prst="rect">
             <a:avLst/>
@@ -2885,23 +2860,23 @@
           <a:lstStyle xmlns:a="http://schemas.openxmlformats.org/drawingml/2006/main"/>
           <a:p xmlns:a="http://schemas.openxmlformats.org/drawingml/2006/main">
             <a:pPr>
-              <a:defRPr sz="4050" b="1">
+              <a:defRPr sz="3450" b="1">
                 <a:solidFill>
-                  <a:srgbClr val="242720"/>
+                  <a:srgbClr val="263C3A"/>
                 </a:solidFill>
-                <a:latin typeface="Arial"/>
-                <a:ea typeface="Arial"/>
-                <a:cs typeface="Arial"/>
+                <a:latin typeface="DejaVu Sans"/>
+                <a:ea typeface="DejaVu Sans"/>
+                <a:cs typeface="DejaVu Sans"/>
               </a:defRPr>
             </a:pPr>
             <a:r>
-              <a:rPr sz="4050" b="1">
+              <a:rPr sz="3450" b="1">
                 <a:solidFill>
-                  <a:srgbClr val="242720"/>
+                  <a:srgbClr val="263C3A"/>
                 </a:solidFill>
-                <a:latin typeface="Arial"/>
-                <a:ea typeface="Arial"/>
-                <a:cs typeface="Arial"/>
+                <a:latin typeface="DejaVu Sans"/>
+                <a:ea typeface="DejaVu Sans"/>
+                <a:cs typeface="DejaVu Sans"/>
               </a:rPr>
               <a:t>Concept map from memory</a:t>
             </a:r>
@@ -2913,7 +2888,7 @@
           <p:cNvPr id="2" name="">
             <a:extLst xmlns:a="http://schemas.openxmlformats.org/drawingml/2006/main">
               <a:ext uri="{FF2B5EF4-FFF2-40B4-BE49-F238E27FC236}">
-                <a16:creationId xmlns:a16="http://schemas.microsoft.com/office/drawing/2014/main" id="{13AB69AA-B5A8-4399-89B8-C04DD5146F4A}"/>
+                <a16:creationId xmlns:a16="http://schemas.microsoft.com/office/drawing/2014/main" id="{718044E8-6940-4C36-88B9-236297226803}"/>
               </a:ext>
             </a:extLst>
           </p:cNvPr>
@@ -2924,8 +2899,8 @@
         </p:nvSpPr>
         <p:spPr>
           <a:xfrm xmlns:a="http://schemas.openxmlformats.org/drawingml/2006/main">
-            <a:off x="609600" y="1190625"/>
-            <a:ext cx="10972800" cy="476250"/>
+            <a:off x="609600" y="1085850"/>
+            <a:ext cx="10972800" cy="409575"/>
           </a:xfrm>
           <a:prstGeom xmlns:a="http://schemas.openxmlformats.org/drawingml/2006/main" prst="rect">
             <a:avLst/>
@@ -2942,25 +2917,25 @@
           <a:lstStyle xmlns:a="http://schemas.openxmlformats.org/drawingml/2006/main"/>
           <a:p xmlns:a="http://schemas.openxmlformats.org/drawingml/2006/main">
             <a:pPr>
-              <a:defRPr sz="2400" b="0">
+              <a:defRPr sz="2175" b="0">
                 <a:solidFill>
-                  <a:srgbClr val="242720"/>
+                  <a:srgbClr val="687572"/>
                 </a:solidFill>
-                <a:latin typeface="Arial"/>
-                <a:ea typeface="Arial"/>
-                <a:cs typeface="Arial"/>
+                <a:latin typeface="DejaVu Sans"/>
+                <a:ea typeface="DejaVu Sans"/>
+                <a:cs typeface="DejaVu Sans"/>
               </a:defRPr>
             </a:pPr>
             <a:r>
-              <a:rPr sz="2400" b="0">
+              <a:rPr sz="2175" b="0">
                 <a:solidFill>
-                  <a:srgbClr val="242720"/>
+                  <a:srgbClr val="687572"/>
                 </a:solidFill>
-                <a:latin typeface="Arial"/>
-                <a:ea typeface="Arial"/>
-                <a:cs typeface="Arial"/>
+                <a:latin typeface="DejaVu Sans"/>
+                <a:ea typeface="DejaVu Sans"/>
+                <a:cs typeface="DejaVu Sans"/>
               </a:rPr>
-              <a:t>[Add your topic or retrieval focus]</a:t>
+              <a:t>[Your topic or retrieval focus]</a:t>
             </a:r>
           </a:p>
         </p:txBody>
@@ -2970,7 +2945,7 @@
           <p:cNvPr id="3" name="">
             <a:extLst xmlns:a="http://schemas.openxmlformats.org/drawingml/2006/main">
               <a:ext uri="{FF2B5EF4-FFF2-40B4-BE49-F238E27FC236}">
-                <a16:creationId xmlns:a16="http://schemas.microsoft.com/office/drawing/2014/main" id="{65B69C1D-BE31-41A4-8BD5-DEFA40FE905E}"/>
+                <a16:creationId xmlns:a16="http://schemas.microsoft.com/office/drawing/2014/main" id="{1E825AE5-8966-4D4D-BD08-F84983510D16}"/>
               </a:ext>
             </a:extLst>
           </p:cNvPr>
@@ -2981,8 +2956,38 @@
         </p:nvSpPr>
         <p:spPr>
           <a:xfrm xmlns:a="http://schemas.openxmlformats.org/drawingml/2006/main">
-            <a:off x="609600" y="1733550"/>
-            <a:ext cx="10972800" cy="400050"/>
+            <a:off x="609600" y="1676400"/>
+            <a:ext cx="10972800" cy="19050"/>
+          </a:xfrm>
+          <a:prstGeom xmlns:a="http://schemas.openxmlformats.org/drawingml/2006/main" prst="rect">
+            <a:avLst/>
+          </a:prstGeom>
+          <a:solidFill xmlns:a="http://schemas.openxmlformats.org/drawingml/2006/main">
+            <a:srgbClr val="A9BDB7"/>
+          </a:solidFill>
+          <a:ln xmlns:a="http://schemas.openxmlformats.org/drawingml/2006/main" w="0">
+            <a:noFill/>
+          </a:ln>
+        </p:spPr>
+      </p:sp>
+      <p:sp>
+        <p:nvSpPr>
+          <p:cNvPr id="4" name="">
+            <a:extLst xmlns:a="http://schemas.openxmlformats.org/drawingml/2006/main">
+              <a:ext uri="{FF2B5EF4-FFF2-40B4-BE49-F238E27FC236}">
+                <a16:creationId xmlns:a16="http://schemas.microsoft.com/office/drawing/2014/main" id="{2AF896C0-6DAF-46FD-BB25-B2EA756BC6C0}"/>
+              </a:ext>
+            </a:extLst>
+          </p:cNvPr>
+          <p:cNvSpPr>
+            <a:spLocks xmlns:a="http://schemas.openxmlformats.org/drawingml/2006/main" noGrp="1"/>
+          </p:cNvSpPr>
+          <p:nvPr/>
+        </p:nvSpPr>
+        <p:spPr>
+          <a:xfrm xmlns:a="http://schemas.openxmlformats.org/drawingml/2006/main">
+            <a:off x="609600" y="1828800"/>
+            <a:ext cx="4476750" cy="304800"/>
           </a:xfrm>
           <a:prstGeom xmlns:a="http://schemas.openxmlformats.org/drawingml/2006/main" prst="rect">
             <a:avLst/>
@@ -2999,35 +3004,35 @@
           <a:lstStyle xmlns:a="http://schemas.openxmlformats.org/drawingml/2006/main"/>
           <a:p xmlns:a="http://schemas.openxmlformats.org/drawingml/2006/main">
             <a:pPr>
-              <a:defRPr sz="1800" b="0">
+              <a:defRPr sz="1575" b="1">
                 <a:solidFill>
-                  <a:srgbClr val="28534A"/>
+                  <a:srgbClr val="263C3A"/>
                 </a:solidFill>
-                <a:latin typeface="Arial"/>
-                <a:ea typeface="Arial"/>
-                <a:cs typeface="Arial"/>
+                <a:latin typeface="DejaVu Sans"/>
+                <a:ea typeface="DejaVu Sans"/>
+                <a:cs typeface="DejaVu Sans"/>
               </a:defRPr>
             </a:pPr>
             <a:r>
-              <a:rPr sz="1800" b="0">
+              <a:rPr sz="1575" b="1">
                 <a:solidFill>
-                  <a:srgbClr val="28534A"/>
+                  <a:srgbClr val="263C3A"/>
                 </a:solidFill>
-                <a:latin typeface="Arial"/>
-                <a:ea typeface="Arial"/>
-                <a:cs typeface="Arial"/>
+                <a:latin typeface="DejaVu Sans"/>
+                <a:ea typeface="DejaVu Sans"/>
+                <a:cs typeface="DejaVu Sans"/>
               </a:rPr>
-              <a:t>Recall independently first. Check and improve after feedback.</a:t>
+              <a:t>01  Recall from memory</a:t>
             </a:r>
           </a:p>
         </p:txBody>
       </p:sp>
       <p:sp>
         <p:nvSpPr>
-          <p:cNvPr id="4" name="">
+          <p:cNvPr id="5" name="">
             <a:extLst xmlns:a="http://schemas.openxmlformats.org/drawingml/2006/main">
               <a:ext uri="{FF2B5EF4-FFF2-40B4-BE49-F238E27FC236}">
-                <a16:creationId xmlns:a16="http://schemas.microsoft.com/office/drawing/2014/main" id="{C2A8BBE8-339B-49A7-A4A6-AA0C8F10E5AD}"/>
+                <a16:creationId xmlns:a16="http://schemas.microsoft.com/office/drawing/2014/main" id="{C127BC20-EFB4-45CC-BC1A-5ED491A19B28}"/>
               </a:ext>
             </a:extLst>
           </p:cNvPr>
@@ -3038,55 +3043,53 @@
         </p:nvSpPr>
         <p:spPr>
           <a:xfrm xmlns:a="http://schemas.openxmlformats.org/drawingml/2006/main">
-            <a:off x="4810125" y="3619500"/>
-            <a:ext cx="2571750" cy="571500"/>
+            <a:off x="6286500" y="1828800"/>
+            <a:ext cx="5048250" cy="304800"/>
           </a:xfrm>
           <a:prstGeom xmlns:a="http://schemas.openxmlformats.org/drawingml/2006/main" prst="rect">
             <a:avLst/>
           </a:prstGeom>
           <a:noFill xmlns:a="http://schemas.openxmlformats.org/drawingml/2006/main"/>
-          <a:ln xmlns:a="http://schemas.openxmlformats.org/drawingml/2006/main" w="9525">
-            <a:solidFill>
-              <a:srgbClr val="CBD0C4"/>
-            </a:solidFill>
+          <a:ln xmlns:a="http://schemas.openxmlformats.org/drawingml/2006/main" w="0">
+            <a:noFill/>
           </a:ln>
         </p:spPr>
         <p:txBody>
-          <a:bodyPr xmlns:a="http://schemas.openxmlformats.org/drawingml/2006/main" lIns="142875" tIns="114300" rIns="142875" bIns="0" anchor="t">
+          <a:bodyPr xmlns:a="http://schemas.openxmlformats.org/drawingml/2006/main" lIns="0" tIns="0" rIns="0" bIns="0" anchor="t">
             <a:noAutofit/>
           </a:bodyPr>
           <a:lstStyle xmlns:a="http://schemas.openxmlformats.org/drawingml/2006/main"/>
           <a:p xmlns:a="http://schemas.openxmlformats.org/drawingml/2006/main">
             <a:pPr>
-              <a:defRPr sz="2400" b="1">
+              <a:defRPr sz="1575" b="1">
                 <a:solidFill>
-                  <a:srgbClr val="242720"/>
+                  <a:srgbClr val="263C3A"/>
                 </a:solidFill>
-                <a:latin typeface="Arial"/>
-                <a:ea typeface="Arial"/>
-                <a:cs typeface="Arial"/>
+                <a:latin typeface="DejaVu Sans"/>
+                <a:ea typeface="DejaVu Sans"/>
+                <a:cs typeface="DejaVu Sans"/>
               </a:defRPr>
             </a:pPr>
             <a:r>
-              <a:rPr sz="2400" b="1">
+              <a:rPr sz="1575" b="1">
                 <a:solidFill>
-                  <a:srgbClr val="242720"/>
+                  <a:srgbClr val="263C3A"/>
                 </a:solidFill>
-                <a:latin typeface="Arial"/>
-                <a:ea typeface="Arial"/>
-                <a:cs typeface="Arial"/>
+                <a:latin typeface="DejaVu Sans"/>
+                <a:ea typeface="DejaVu Sans"/>
+                <a:cs typeface="DejaVu Sans"/>
               </a:rPr>
-              <a:t>[Topic]</a:t>
+              <a:t>02  Check and improve</a:t>
             </a:r>
           </a:p>
         </p:txBody>
       </p:sp>
       <p:sp>
         <p:nvSpPr>
-          <p:cNvPr id="5" name="">
+          <p:cNvPr id="6" name="">
             <a:extLst xmlns:a="http://schemas.openxmlformats.org/drawingml/2006/main">
               <a:ext uri="{FF2B5EF4-FFF2-40B4-BE49-F238E27FC236}">
-                <a16:creationId xmlns:a16="http://schemas.microsoft.com/office/drawing/2014/main" id="{9DC9D973-D25C-4A0C-B08B-DDE1779D0F74}"/>
+                <a16:creationId xmlns:a16="http://schemas.microsoft.com/office/drawing/2014/main" id="{218A395E-E682-46FC-AC0F-7FCDE391DD1B}"/>
               </a:ext>
             </a:extLst>
           </p:cNvPr>
@@ -3097,55 +3100,26 @@
         </p:nvSpPr>
         <p:spPr>
           <a:xfrm xmlns:a="http://schemas.openxmlformats.org/drawingml/2006/main">
-            <a:off x="609600" y="2381250"/>
-            <a:ext cx="3524250" cy="714375"/>
+            <a:off x="4133850" y="2657475"/>
+            <a:ext cx="3924300" cy="19050"/>
           </a:xfrm>
           <a:prstGeom xmlns:a="http://schemas.openxmlformats.org/drawingml/2006/main" prst="rect">
             <a:avLst/>
           </a:prstGeom>
-          <a:noFill xmlns:a="http://schemas.openxmlformats.org/drawingml/2006/main"/>
-          <a:ln xmlns:a="http://schemas.openxmlformats.org/drawingml/2006/main" w="9525">
-            <a:solidFill>
-              <a:srgbClr val="CBD0C4"/>
-            </a:solidFill>
+          <a:solidFill xmlns:a="http://schemas.openxmlformats.org/drawingml/2006/main">
+            <a:srgbClr val="A9BDB7"/>
+          </a:solidFill>
+          <a:ln xmlns:a="http://schemas.openxmlformats.org/drawingml/2006/main" w="0">
+            <a:noFill/>
           </a:ln>
         </p:spPr>
-        <p:txBody>
-          <a:bodyPr xmlns:a="http://schemas.openxmlformats.org/drawingml/2006/main" lIns="142875" tIns="114300" rIns="142875" bIns="0" anchor="t">
-            <a:noAutofit/>
-          </a:bodyPr>
-          <a:lstStyle xmlns:a="http://schemas.openxmlformats.org/drawingml/2006/main"/>
-          <a:p xmlns:a="http://schemas.openxmlformats.org/drawingml/2006/main">
-            <a:pPr>
-              <a:defRPr sz="2100" b="0">
-                <a:solidFill>
-                  <a:srgbClr val="42473D"/>
-                </a:solidFill>
-                <a:latin typeface="Arial"/>
-                <a:ea typeface="Arial"/>
-                <a:cs typeface="Arial"/>
-              </a:defRPr>
-            </a:pPr>
-            <a:r>
-              <a:rPr sz="2100" b="0">
-                <a:solidFill>
-                  <a:srgbClr val="42473D"/>
-                </a:solidFill>
-                <a:latin typeface="Arial"/>
-                <a:ea typeface="Arial"/>
-                <a:cs typeface="Arial"/>
-              </a:rPr>
-              <a:t>[Idea or concept]</a:t>
-            </a:r>
-          </a:p>
-        </p:txBody>
-      </p:sp>
-      <p:sp>
-        <p:nvSpPr>
-          <p:cNvPr id="6" name="">
+      </p:sp>
+      <p:sp>
+        <p:nvSpPr>
+          <p:cNvPr id="7" name="">
             <a:extLst xmlns:a="http://schemas.openxmlformats.org/drawingml/2006/main">
               <a:ext uri="{FF2B5EF4-FFF2-40B4-BE49-F238E27FC236}">
-                <a16:creationId xmlns:a16="http://schemas.microsoft.com/office/drawing/2014/main" id="{D20B14E1-D81C-4840-AA80-EDF05BB67E91}"/>
+                <a16:creationId xmlns:a16="http://schemas.microsoft.com/office/drawing/2014/main" id="{96AE11E1-2FA5-4A21-9088-4DF2F51F725B}"/>
               </a:ext>
             </a:extLst>
           </p:cNvPr>
@@ -3156,55 +3130,26 @@
         </p:nvSpPr>
         <p:spPr>
           <a:xfrm xmlns:a="http://schemas.openxmlformats.org/drawingml/2006/main">
-            <a:off x="8001000" y="2381250"/>
-            <a:ext cx="3581400" cy="714375"/>
+            <a:off x="6096000" y="2657475"/>
+            <a:ext cx="19050" cy="704850"/>
           </a:xfrm>
           <a:prstGeom xmlns:a="http://schemas.openxmlformats.org/drawingml/2006/main" prst="rect">
             <a:avLst/>
           </a:prstGeom>
-          <a:noFill xmlns:a="http://schemas.openxmlformats.org/drawingml/2006/main"/>
-          <a:ln xmlns:a="http://schemas.openxmlformats.org/drawingml/2006/main" w="9525">
-            <a:solidFill>
-              <a:srgbClr val="CBD0C4"/>
-            </a:solidFill>
+          <a:solidFill xmlns:a="http://schemas.openxmlformats.org/drawingml/2006/main">
+            <a:srgbClr val="A9BDB7"/>
+          </a:solidFill>
+          <a:ln xmlns:a="http://schemas.openxmlformats.org/drawingml/2006/main" w="0">
+            <a:noFill/>
           </a:ln>
         </p:spPr>
-        <p:txBody>
-          <a:bodyPr xmlns:a="http://schemas.openxmlformats.org/drawingml/2006/main" lIns="142875" tIns="114300" rIns="142875" bIns="0" anchor="t">
-            <a:noAutofit/>
-          </a:bodyPr>
-          <a:lstStyle xmlns:a="http://schemas.openxmlformats.org/drawingml/2006/main"/>
-          <a:p xmlns:a="http://schemas.openxmlformats.org/drawingml/2006/main">
-            <a:pPr>
-              <a:defRPr sz="2100" b="0">
-                <a:solidFill>
-                  <a:srgbClr val="42473D"/>
-                </a:solidFill>
-                <a:latin typeface="Arial"/>
-                <a:ea typeface="Arial"/>
-                <a:cs typeface="Arial"/>
-              </a:defRPr>
-            </a:pPr>
-            <a:r>
-              <a:rPr sz="2100" b="0">
-                <a:solidFill>
-                  <a:srgbClr val="42473D"/>
-                </a:solidFill>
-                <a:latin typeface="Arial"/>
-                <a:ea typeface="Arial"/>
-                <a:cs typeface="Arial"/>
-              </a:rPr>
-              <a:t>[Idea or concept]</a:t>
-            </a:r>
-          </a:p>
-        </p:txBody>
-      </p:sp>
-      <p:sp>
-        <p:nvSpPr>
-          <p:cNvPr id="7" name="">
+      </p:sp>
+      <p:sp>
+        <p:nvSpPr>
+          <p:cNvPr id="8" name="">
             <a:extLst xmlns:a="http://schemas.openxmlformats.org/drawingml/2006/main">
               <a:ext uri="{FF2B5EF4-FFF2-40B4-BE49-F238E27FC236}">
-                <a16:creationId xmlns:a16="http://schemas.microsoft.com/office/drawing/2014/main" id="{AC4146F6-3DCE-4C61-B3D4-66F9B13E138D}"/>
+                <a16:creationId xmlns:a16="http://schemas.microsoft.com/office/drawing/2014/main" id="{17A7A514-3A91-4125-AB0F-C04FAE40A192}"/>
               </a:ext>
             </a:extLst>
           </p:cNvPr>
@@ -3215,55 +3160,26 @@
         </p:nvSpPr>
         <p:spPr>
           <a:xfrm xmlns:a="http://schemas.openxmlformats.org/drawingml/2006/main">
-            <a:off x="609600" y="4810125"/>
-            <a:ext cx="3524250" cy="714375"/>
+            <a:off x="4133850" y="5114925"/>
+            <a:ext cx="3924300" cy="19050"/>
           </a:xfrm>
           <a:prstGeom xmlns:a="http://schemas.openxmlformats.org/drawingml/2006/main" prst="rect">
             <a:avLst/>
           </a:prstGeom>
-          <a:noFill xmlns:a="http://schemas.openxmlformats.org/drawingml/2006/main"/>
-          <a:ln xmlns:a="http://schemas.openxmlformats.org/drawingml/2006/main" w="9525">
-            <a:solidFill>
-              <a:srgbClr val="CBD0C4"/>
-            </a:solidFill>
+          <a:solidFill xmlns:a="http://schemas.openxmlformats.org/drawingml/2006/main">
+            <a:srgbClr val="A9BDB7"/>
+          </a:solidFill>
+          <a:ln xmlns:a="http://schemas.openxmlformats.org/drawingml/2006/main" w="0">
+            <a:noFill/>
           </a:ln>
         </p:spPr>
-        <p:txBody>
-          <a:bodyPr xmlns:a="http://schemas.openxmlformats.org/drawingml/2006/main" lIns="142875" tIns="114300" rIns="142875" bIns="0" anchor="t">
-            <a:noAutofit/>
-          </a:bodyPr>
-          <a:lstStyle xmlns:a="http://schemas.openxmlformats.org/drawingml/2006/main"/>
-          <a:p xmlns:a="http://schemas.openxmlformats.org/drawingml/2006/main">
-            <a:pPr>
-              <a:defRPr sz="2100" b="0">
-                <a:solidFill>
-                  <a:srgbClr val="42473D"/>
-                </a:solidFill>
-                <a:latin typeface="Arial"/>
-                <a:ea typeface="Arial"/>
-                <a:cs typeface="Arial"/>
-              </a:defRPr>
-            </a:pPr>
-            <a:r>
-              <a:rPr sz="2100" b="0">
-                <a:solidFill>
-                  <a:srgbClr val="42473D"/>
-                </a:solidFill>
-                <a:latin typeface="Arial"/>
-                <a:ea typeface="Arial"/>
-                <a:cs typeface="Arial"/>
-              </a:rPr>
-              <a:t>[Idea or concept]</a:t>
-            </a:r>
-          </a:p>
-        </p:txBody>
-      </p:sp>
-      <p:sp>
-        <p:nvSpPr>
-          <p:cNvPr id="8" name="">
+      </p:sp>
+      <p:sp>
+        <p:nvSpPr>
+          <p:cNvPr id="9" name="">
             <a:extLst xmlns:a="http://schemas.openxmlformats.org/drawingml/2006/main">
               <a:ext uri="{FF2B5EF4-FFF2-40B4-BE49-F238E27FC236}">
-                <a16:creationId xmlns:a16="http://schemas.microsoft.com/office/drawing/2014/main" id="{B55AF2F6-6FEB-4B95-83C4-465412C2247E}"/>
+                <a16:creationId xmlns:a16="http://schemas.microsoft.com/office/drawing/2014/main" id="{3BCC4EE3-D875-4593-A750-70C39161BEB7}"/>
               </a:ext>
             </a:extLst>
           </p:cNvPr>
@@ -3274,55 +3190,26 @@
         </p:nvSpPr>
         <p:spPr>
           <a:xfrm xmlns:a="http://schemas.openxmlformats.org/drawingml/2006/main">
-            <a:off x="8001000" y="4810125"/>
-            <a:ext cx="3581400" cy="714375"/>
+            <a:off x="6096000" y="4429125"/>
+            <a:ext cx="19050" cy="685800"/>
           </a:xfrm>
           <a:prstGeom xmlns:a="http://schemas.openxmlformats.org/drawingml/2006/main" prst="rect">
             <a:avLst/>
           </a:prstGeom>
-          <a:noFill xmlns:a="http://schemas.openxmlformats.org/drawingml/2006/main"/>
-          <a:ln xmlns:a="http://schemas.openxmlformats.org/drawingml/2006/main" w="9525">
-            <a:solidFill>
-              <a:srgbClr val="CBD0C4"/>
-            </a:solidFill>
+          <a:solidFill xmlns:a="http://schemas.openxmlformats.org/drawingml/2006/main">
+            <a:srgbClr val="A9BDB7"/>
+          </a:solidFill>
+          <a:ln xmlns:a="http://schemas.openxmlformats.org/drawingml/2006/main" w="0">
+            <a:noFill/>
           </a:ln>
         </p:spPr>
-        <p:txBody>
-          <a:bodyPr xmlns:a="http://schemas.openxmlformats.org/drawingml/2006/main" lIns="142875" tIns="114300" rIns="142875" bIns="0" anchor="t">
-            <a:noAutofit/>
-          </a:bodyPr>
-          <a:lstStyle xmlns:a="http://schemas.openxmlformats.org/drawingml/2006/main"/>
-          <a:p xmlns:a="http://schemas.openxmlformats.org/drawingml/2006/main">
-            <a:pPr>
-              <a:defRPr sz="2100" b="0">
-                <a:solidFill>
-                  <a:srgbClr val="42473D"/>
-                </a:solidFill>
-                <a:latin typeface="Arial"/>
-                <a:ea typeface="Arial"/>
-                <a:cs typeface="Arial"/>
-              </a:defRPr>
-            </a:pPr>
-            <a:r>
-              <a:rPr sz="2100" b="0">
-                <a:solidFill>
-                  <a:srgbClr val="42473D"/>
-                </a:solidFill>
-                <a:latin typeface="Arial"/>
-                <a:ea typeface="Arial"/>
-                <a:cs typeface="Arial"/>
-              </a:rPr>
-              <a:t>[Idea or concept]</a:t>
-            </a:r>
-          </a:p>
-        </p:txBody>
-      </p:sp>
-      <p:sp>
-        <p:nvSpPr>
-          <p:cNvPr id="9" name="">
+      </p:sp>
+      <p:sp>
+        <p:nvSpPr>
+          <p:cNvPr id="10" name="">
             <a:extLst xmlns:a="http://schemas.openxmlformats.org/drawingml/2006/main">
               <a:ext uri="{FF2B5EF4-FFF2-40B4-BE49-F238E27FC236}">
-                <a16:creationId xmlns:a16="http://schemas.microsoft.com/office/drawing/2014/main" id="{5923BF91-9106-4F68-97DA-4D5EF44D6674}"/>
+                <a16:creationId xmlns:a16="http://schemas.microsoft.com/office/drawing/2014/main" id="{6D85D63F-962A-4BD7-A783-F03932315F18}"/>
               </a:ext>
             </a:extLst>
           </p:cNvPr>
@@ -3333,8 +3220,40 @@
         </p:nvSpPr>
         <p:spPr>
           <a:xfrm xmlns:a="http://schemas.openxmlformats.org/drawingml/2006/main">
-            <a:off x="4191000" y="4524375"/>
-            <a:ext cx="3810000" cy="838200"/>
+            <a:off x="4857750" y="3362325"/>
+            <a:ext cx="2476500" cy="1066800"/>
+          </a:xfrm>
+          <a:prstGeom xmlns:a="http://schemas.openxmlformats.org/drawingml/2006/main" prst="ellipse">
+            <a:avLst/>
+          </a:prstGeom>
+          <a:solidFill xmlns:a="http://schemas.openxmlformats.org/drawingml/2006/main">
+            <a:srgbClr val="E7EEE9"/>
+          </a:solidFill>
+          <a:ln xmlns:a="http://schemas.openxmlformats.org/drawingml/2006/main" w="9525">
+            <a:solidFill>
+              <a:srgbClr val="A9BDB7"/>
+            </a:solidFill>
+          </a:ln>
+        </p:spPr>
+      </p:sp>
+      <p:sp>
+        <p:nvSpPr>
+          <p:cNvPr id="11" name="">
+            <a:extLst xmlns:a="http://schemas.openxmlformats.org/drawingml/2006/main">
+              <a:ext uri="{FF2B5EF4-FFF2-40B4-BE49-F238E27FC236}">
+                <a16:creationId xmlns:a16="http://schemas.microsoft.com/office/drawing/2014/main" id="{9C426CE8-6968-4998-BBFA-435FD63A42AB}"/>
+              </a:ext>
+            </a:extLst>
+          </p:cNvPr>
+          <p:cNvSpPr>
+            <a:spLocks xmlns:a="http://schemas.openxmlformats.org/drawingml/2006/main" noGrp="1"/>
+          </p:cNvSpPr>
+          <p:nvPr/>
+        </p:nvSpPr>
+        <p:spPr>
+          <a:xfrm xmlns:a="http://schemas.openxmlformats.org/drawingml/2006/main">
+            <a:off x="5391150" y="3705225"/>
+            <a:ext cx="1714500" cy="428625"/>
           </a:xfrm>
           <a:prstGeom xmlns:a="http://schemas.openxmlformats.org/drawingml/2006/main" prst="rect">
             <a:avLst/>
@@ -3351,35 +3270,35 @@
           <a:lstStyle xmlns:a="http://schemas.openxmlformats.org/drawingml/2006/main"/>
           <a:p xmlns:a="http://schemas.openxmlformats.org/drawingml/2006/main">
             <a:pPr>
-              <a:defRPr sz="1800" b="0">
+              <a:defRPr sz="2175" b="1">
                 <a:solidFill>
-                  <a:srgbClr val="242720"/>
+                  <a:srgbClr val="263C3A"/>
                 </a:solidFill>
-                <a:latin typeface="Arial"/>
-                <a:ea typeface="Arial"/>
-                <a:cs typeface="Arial"/>
+                <a:latin typeface="DejaVu Sans"/>
+                <a:ea typeface="DejaVu Sans"/>
+                <a:cs typeface="DejaVu Sans"/>
               </a:defRPr>
             </a:pPr>
             <a:r>
-              <a:rPr sz="1800" b="0">
+              <a:rPr sz="2175" b="1">
                 <a:solidFill>
-                  <a:srgbClr val="242720"/>
+                  <a:srgbClr val="263C3A"/>
                 </a:solidFill>
-                <a:latin typeface="Arial"/>
-                <a:ea typeface="Arial"/>
-                <a:cs typeface="Arial"/>
+                <a:latin typeface="DejaVu Sans"/>
+                <a:ea typeface="DejaVu Sans"/>
+                <a:cs typeface="DejaVu Sans"/>
               </a:rPr>
-              <a:t>Add remembered ideas and label the connections.</a:t>
+              <a:t>[Topic]</a:t>
             </a:r>
           </a:p>
         </p:txBody>
       </p:sp>
       <p:sp>
         <p:nvSpPr>
-          <p:cNvPr id="10" name="">
+          <p:cNvPr id="12" name="">
             <a:extLst xmlns:a="http://schemas.openxmlformats.org/drawingml/2006/main">
               <a:ext uri="{FF2B5EF4-FFF2-40B4-BE49-F238E27FC236}">
-                <a16:creationId xmlns:a16="http://schemas.microsoft.com/office/drawing/2014/main" id="{8776E11C-6429-44E7-8566-D8C612EDD2E6}"/>
+                <a16:creationId xmlns:a16="http://schemas.microsoft.com/office/drawing/2014/main" id="{20B063C7-E728-44F6-B5B0-B0BD3717B30B}"/>
               </a:ext>
             </a:extLst>
           </p:cNvPr>
@@ -3390,8 +3309,40 @@
         </p:nvSpPr>
         <p:spPr>
           <a:xfrm xmlns:a="http://schemas.openxmlformats.org/drawingml/2006/main">
-            <a:off x="609600" y="5953125"/>
-            <a:ext cx="10972800" cy="381000"/>
+            <a:off x="609600" y="2305050"/>
+            <a:ext cx="3524250" cy="704850"/>
+          </a:xfrm>
+          <a:prstGeom xmlns:a="http://schemas.openxmlformats.org/drawingml/2006/main" prst="rect">
+            <a:avLst/>
+          </a:prstGeom>
+          <a:solidFill xmlns:a="http://schemas.openxmlformats.org/drawingml/2006/main">
+            <a:srgbClr val="EDF2F5"/>
+          </a:solidFill>
+          <a:ln xmlns:a="http://schemas.openxmlformats.org/drawingml/2006/main" w="9525">
+            <a:solidFill>
+              <a:srgbClr val="D4DFDB"/>
+            </a:solidFill>
+          </a:ln>
+        </p:spPr>
+      </p:sp>
+      <p:sp>
+        <p:nvSpPr>
+          <p:cNvPr id="13" name="">
+            <a:extLst xmlns:a="http://schemas.openxmlformats.org/drawingml/2006/main">
+              <a:ext uri="{FF2B5EF4-FFF2-40B4-BE49-F238E27FC236}">
+                <a16:creationId xmlns:a16="http://schemas.microsoft.com/office/drawing/2014/main" id="{0F7B7981-AC8F-4DA7-AD90-AB93F5AB3525}"/>
+              </a:ext>
+            </a:extLst>
+          </p:cNvPr>
+          <p:cNvSpPr>
+            <a:spLocks xmlns:a="http://schemas.openxmlformats.org/drawingml/2006/main" noGrp="1"/>
+          </p:cNvSpPr>
+          <p:nvPr/>
+        </p:nvSpPr>
+        <p:spPr>
+          <a:xfrm xmlns:a="http://schemas.openxmlformats.org/drawingml/2006/main">
+            <a:off x="800100" y="2495550"/>
+            <a:ext cx="3143250" cy="428625"/>
           </a:xfrm>
           <a:prstGeom xmlns:a="http://schemas.openxmlformats.org/drawingml/2006/main" prst="rect">
             <a:avLst/>
@@ -3408,35 +3359,35 @@
           <a:lstStyle xmlns:a="http://schemas.openxmlformats.org/drawingml/2006/main"/>
           <a:p xmlns:a="http://schemas.openxmlformats.org/drawingml/2006/main">
             <a:pPr>
-              <a:defRPr sz="1800" b="0">
+              <a:defRPr sz="1950" b="0">
                 <a:solidFill>
-                  <a:srgbClr val="28534A"/>
+                  <a:srgbClr val="263C3A"/>
                 </a:solidFill>
-                <a:latin typeface="Arial"/>
-                <a:ea typeface="Arial"/>
-                <a:cs typeface="Arial"/>
+                <a:latin typeface="DejaVu Sans"/>
+                <a:ea typeface="DejaVu Sans"/>
+                <a:cs typeface="DejaVu Sans"/>
               </a:defRPr>
             </a:pPr>
             <a:r>
-              <a:rPr sz="1800" b="0">
+              <a:rPr sz="1950" b="0">
                 <a:solidFill>
-                  <a:srgbClr val="28534A"/>
+                  <a:srgbClr val="263C3A"/>
                 </a:solidFill>
-                <a:latin typeface="Arial"/>
-                <a:ea typeface="Arial"/>
-                <a:cs typeface="Arial"/>
+                <a:latin typeface="DejaVu Sans"/>
+                <a:ea typeface="DejaVu Sans"/>
+                <a:cs typeface="DejaVu Sans"/>
               </a:rPr>
-              <a:t>Time: [Add minutes]     Check: [Add your feedback routine]</a:t>
+              <a:t>[Idea or concept]</a:t>
             </a:r>
           </a:p>
         </p:txBody>
       </p:sp>
       <p:sp>
         <p:nvSpPr>
-          <p:cNvPr id="11" name="">
+          <p:cNvPr id="14" name="">
             <a:extLst xmlns:a="http://schemas.openxmlformats.org/drawingml/2006/main">
               <a:ext uri="{FF2B5EF4-FFF2-40B4-BE49-F238E27FC236}">
-                <a16:creationId xmlns:a16="http://schemas.microsoft.com/office/drawing/2014/main" id="{84345DBB-863E-4C98-B4AB-F90BDBA237D2}"/>
+                <a16:creationId xmlns:a16="http://schemas.microsoft.com/office/drawing/2014/main" id="{F638DEA5-9340-4712-B0A7-234D7BBD3771}"/>
               </a:ext>
             </a:extLst>
           </p:cNvPr>
@@ -3447,8 +3398,40 @@
         </p:nvSpPr>
         <p:spPr>
           <a:xfrm xmlns:a="http://schemas.openxmlformats.org/drawingml/2006/main">
-            <a:off x="609600" y="6534150"/>
-            <a:ext cx="10972800" cy="209550"/>
+            <a:off x="8058150" y="2305050"/>
+            <a:ext cx="3524250" cy="704850"/>
+          </a:xfrm>
+          <a:prstGeom xmlns:a="http://schemas.openxmlformats.org/drawingml/2006/main" prst="rect">
+            <a:avLst/>
+          </a:prstGeom>
+          <a:solidFill xmlns:a="http://schemas.openxmlformats.org/drawingml/2006/main">
+            <a:srgbClr val="EDF2F5"/>
+          </a:solidFill>
+          <a:ln xmlns:a="http://schemas.openxmlformats.org/drawingml/2006/main" w="9525">
+            <a:solidFill>
+              <a:srgbClr val="D4DFDB"/>
+            </a:solidFill>
+          </a:ln>
+        </p:spPr>
+      </p:sp>
+      <p:sp>
+        <p:nvSpPr>
+          <p:cNvPr id="15" name="">
+            <a:extLst xmlns:a="http://schemas.openxmlformats.org/drawingml/2006/main">
+              <a:ext uri="{FF2B5EF4-FFF2-40B4-BE49-F238E27FC236}">
+                <a16:creationId xmlns:a16="http://schemas.microsoft.com/office/drawing/2014/main" id="{46720541-918B-464E-AF57-9ACC5C62C257}"/>
+              </a:ext>
+            </a:extLst>
+          </p:cNvPr>
+          <p:cNvSpPr>
+            <a:spLocks xmlns:a="http://schemas.openxmlformats.org/drawingml/2006/main" noGrp="1"/>
+          </p:cNvSpPr>
+          <p:nvPr/>
+        </p:nvSpPr>
+        <p:spPr>
+          <a:xfrm xmlns:a="http://schemas.openxmlformats.org/drawingml/2006/main">
+            <a:off x="8248650" y="2495550"/>
+            <a:ext cx="3143250" cy="428625"/>
           </a:xfrm>
           <a:prstGeom xmlns:a="http://schemas.openxmlformats.org/drawingml/2006/main" prst="rect">
             <a:avLst/>
@@ -3465,33 +3448,412 @@
           <a:lstStyle xmlns:a="http://schemas.openxmlformats.org/drawingml/2006/main"/>
           <a:p xmlns:a="http://schemas.openxmlformats.org/drawingml/2006/main">
             <a:pPr>
-              <a:defRPr sz="1050" b="0">
+              <a:defRPr sz="1950" b="0">
                 <a:solidFill>
-                  <a:srgbClr val="62675C"/>
+                  <a:srgbClr val="263C3A"/>
                 </a:solidFill>
-                <a:latin typeface="Arial"/>
-                <a:ea typeface="Arial"/>
-                <a:cs typeface="Arial"/>
+                <a:latin typeface="DejaVu Sans"/>
+                <a:ea typeface="DejaVu Sans"/>
+                <a:cs typeface="DejaVu Sans"/>
               </a:defRPr>
             </a:pPr>
             <a:r>
-              <a:rPr sz="1050" b="0">
+              <a:rPr sz="1950" b="0">
                 <a:solidFill>
-                  <a:srgbClr val="62675C"/>
+                  <a:srgbClr val="263C3A"/>
                 </a:solidFill>
-                <a:latin typeface="Arial"/>
-                <a:ea typeface="Arial"/>
-                <a:cs typeface="Arial"/>
+                <a:latin typeface="DejaVu Sans"/>
+                <a:ea typeface="DejaVu Sans"/>
+                <a:cs typeface="DejaVu Sans"/>
               </a:rPr>
-              <a:t>TNT Teaching Tools   Editable classroom template   Source and teacher guidance in speaker notes</a:t>
+              <a:t>[Idea or concept]</a:t>
             </a:r>
           </a:p>
         </p:txBody>
       </p:sp>
+      <p:sp>
+        <p:nvSpPr>
+          <p:cNvPr id="16" name="">
+            <a:extLst xmlns:a="http://schemas.openxmlformats.org/drawingml/2006/main">
+              <a:ext uri="{FF2B5EF4-FFF2-40B4-BE49-F238E27FC236}">
+                <a16:creationId xmlns:a16="http://schemas.microsoft.com/office/drawing/2014/main" id="{EAD668E0-2ECF-45D6-800B-7075B72A085B}"/>
+              </a:ext>
+            </a:extLst>
+          </p:cNvPr>
+          <p:cNvSpPr>
+            <a:spLocks xmlns:a="http://schemas.openxmlformats.org/drawingml/2006/main" noGrp="1"/>
+          </p:cNvSpPr>
+          <p:nvPr/>
+        </p:nvSpPr>
+        <p:spPr>
+          <a:xfrm xmlns:a="http://schemas.openxmlformats.org/drawingml/2006/main">
+            <a:off x="609600" y="4762500"/>
+            <a:ext cx="3524250" cy="704850"/>
+          </a:xfrm>
+          <a:prstGeom xmlns:a="http://schemas.openxmlformats.org/drawingml/2006/main" prst="rect">
+            <a:avLst/>
+          </a:prstGeom>
+          <a:solidFill xmlns:a="http://schemas.openxmlformats.org/drawingml/2006/main">
+            <a:srgbClr val="EDF2F5"/>
+          </a:solidFill>
+          <a:ln xmlns:a="http://schemas.openxmlformats.org/drawingml/2006/main" w="9525">
+            <a:solidFill>
+              <a:srgbClr val="D4DFDB"/>
+            </a:solidFill>
+          </a:ln>
+        </p:spPr>
+      </p:sp>
+      <p:sp>
+        <p:nvSpPr>
+          <p:cNvPr id="17" name="">
+            <a:extLst xmlns:a="http://schemas.openxmlformats.org/drawingml/2006/main">
+              <a:ext uri="{FF2B5EF4-FFF2-40B4-BE49-F238E27FC236}">
+                <a16:creationId xmlns:a16="http://schemas.microsoft.com/office/drawing/2014/main" id="{CE005901-619F-4E63-BCCE-387A17554C7D}"/>
+              </a:ext>
+            </a:extLst>
+          </p:cNvPr>
+          <p:cNvSpPr>
+            <a:spLocks xmlns:a="http://schemas.openxmlformats.org/drawingml/2006/main" noGrp="1"/>
+          </p:cNvSpPr>
+          <p:nvPr/>
+        </p:nvSpPr>
+        <p:spPr>
+          <a:xfrm xmlns:a="http://schemas.openxmlformats.org/drawingml/2006/main">
+            <a:off x="800100" y="4953000"/>
+            <a:ext cx="3143250" cy="428625"/>
+          </a:xfrm>
+          <a:prstGeom xmlns:a="http://schemas.openxmlformats.org/drawingml/2006/main" prst="rect">
+            <a:avLst/>
+          </a:prstGeom>
+          <a:noFill xmlns:a="http://schemas.openxmlformats.org/drawingml/2006/main"/>
+          <a:ln xmlns:a="http://schemas.openxmlformats.org/drawingml/2006/main" w="0">
+            <a:noFill/>
+          </a:ln>
+        </p:spPr>
+        <p:txBody>
+          <a:bodyPr xmlns:a="http://schemas.openxmlformats.org/drawingml/2006/main" lIns="0" tIns="0" rIns="0" bIns="0" anchor="t">
+            <a:noAutofit/>
+          </a:bodyPr>
+          <a:lstStyle xmlns:a="http://schemas.openxmlformats.org/drawingml/2006/main"/>
+          <a:p xmlns:a="http://schemas.openxmlformats.org/drawingml/2006/main">
+            <a:pPr>
+              <a:defRPr sz="1950" b="0">
+                <a:solidFill>
+                  <a:srgbClr val="263C3A"/>
+                </a:solidFill>
+                <a:latin typeface="DejaVu Sans"/>
+                <a:ea typeface="DejaVu Sans"/>
+                <a:cs typeface="DejaVu Sans"/>
+              </a:defRPr>
+            </a:pPr>
+            <a:r>
+              <a:rPr sz="1950" b="0">
+                <a:solidFill>
+                  <a:srgbClr val="263C3A"/>
+                </a:solidFill>
+                <a:latin typeface="DejaVu Sans"/>
+                <a:ea typeface="DejaVu Sans"/>
+                <a:cs typeface="DejaVu Sans"/>
+              </a:rPr>
+              <a:t>[Idea or concept]</a:t>
+            </a:r>
+          </a:p>
+        </p:txBody>
+      </p:sp>
+      <p:sp>
+        <p:nvSpPr>
+          <p:cNvPr id="18" name="">
+            <a:extLst xmlns:a="http://schemas.openxmlformats.org/drawingml/2006/main">
+              <a:ext uri="{FF2B5EF4-FFF2-40B4-BE49-F238E27FC236}">
+                <a16:creationId xmlns:a16="http://schemas.microsoft.com/office/drawing/2014/main" id="{0AFE957C-6596-452F-B20A-198AC895E339}"/>
+              </a:ext>
+            </a:extLst>
+          </p:cNvPr>
+          <p:cNvSpPr>
+            <a:spLocks xmlns:a="http://schemas.openxmlformats.org/drawingml/2006/main" noGrp="1"/>
+          </p:cNvSpPr>
+          <p:nvPr/>
+        </p:nvSpPr>
+        <p:spPr>
+          <a:xfrm xmlns:a="http://schemas.openxmlformats.org/drawingml/2006/main">
+            <a:off x="8058150" y="4762500"/>
+            <a:ext cx="3524250" cy="704850"/>
+          </a:xfrm>
+          <a:prstGeom xmlns:a="http://schemas.openxmlformats.org/drawingml/2006/main" prst="rect">
+            <a:avLst/>
+          </a:prstGeom>
+          <a:solidFill xmlns:a="http://schemas.openxmlformats.org/drawingml/2006/main">
+            <a:srgbClr val="EDF2F5"/>
+          </a:solidFill>
+          <a:ln xmlns:a="http://schemas.openxmlformats.org/drawingml/2006/main" w="9525">
+            <a:solidFill>
+              <a:srgbClr val="D4DFDB"/>
+            </a:solidFill>
+          </a:ln>
+        </p:spPr>
+      </p:sp>
+      <p:sp>
+        <p:nvSpPr>
+          <p:cNvPr id="19" name="">
+            <a:extLst xmlns:a="http://schemas.openxmlformats.org/drawingml/2006/main">
+              <a:ext uri="{FF2B5EF4-FFF2-40B4-BE49-F238E27FC236}">
+                <a16:creationId xmlns:a16="http://schemas.microsoft.com/office/drawing/2014/main" id="{DAB0B509-7C15-4441-A192-6D49D84EB6D1}"/>
+              </a:ext>
+            </a:extLst>
+          </p:cNvPr>
+          <p:cNvSpPr>
+            <a:spLocks xmlns:a="http://schemas.openxmlformats.org/drawingml/2006/main" noGrp="1"/>
+          </p:cNvSpPr>
+          <p:nvPr/>
+        </p:nvSpPr>
+        <p:spPr>
+          <a:xfrm xmlns:a="http://schemas.openxmlformats.org/drawingml/2006/main">
+            <a:off x="8248650" y="4953000"/>
+            <a:ext cx="3143250" cy="428625"/>
+          </a:xfrm>
+          <a:prstGeom xmlns:a="http://schemas.openxmlformats.org/drawingml/2006/main" prst="rect">
+            <a:avLst/>
+          </a:prstGeom>
+          <a:noFill xmlns:a="http://schemas.openxmlformats.org/drawingml/2006/main"/>
+          <a:ln xmlns:a="http://schemas.openxmlformats.org/drawingml/2006/main" w="0">
+            <a:noFill/>
+          </a:ln>
+        </p:spPr>
+        <p:txBody>
+          <a:bodyPr xmlns:a="http://schemas.openxmlformats.org/drawingml/2006/main" lIns="0" tIns="0" rIns="0" bIns="0" anchor="t">
+            <a:noAutofit/>
+          </a:bodyPr>
+          <a:lstStyle xmlns:a="http://schemas.openxmlformats.org/drawingml/2006/main"/>
+          <a:p xmlns:a="http://schemas.openxmlformats.org/drawingml/2006/main">
+            <a:pPr>
+              <a:defRPr sz="1950" b="0">
+                <a:solidFill>
+                  <a:srgbClr val="263C3A"/>
+                </a:solidFill>
+                <a:latin typeface="DejaVu Sans"/>
+                <a:ea typeface="DejaVu Sans"/>
+                <a:cs typeface="DejaVu Sans"/>
+              </a:defRPr>
+            </a:pPr>
+            <a:r>
+              <a:rPr sz="1950" b="0">
+                <a:solidFill>
+                  <a:srgbClr val="263C3A"/>
+                </a:solidFill>
+                <a:latin typeface="DejaVu Sans"/>
+                <a:ea typeface="DejaVu Sans"/>
+                <a:cs typeface="DejaVu Sans"/>
+              </a:rPr>
+              <a:t>[Idea or concept]</a:t>
+            </a:r>
+          </a:p>
+        </p:txBody>
+      </p:sp>
+      <p:sp>
+        <p:nvSpPr>
+          <p:cNvPr id="20" name="">
+            <a:extLst xmlns:a="http://schemas.openxmlformats.org/drawingml/2006/main">
+              <a:ext uri="{FF2B5EF4-FFF2-40B4-BE49-F238E27FC236}">
+                <a16:creationId xmlns:a16="http://schemas.microsoft.com/office/drawing/2014/main" id="{D97731E3-59C5-457F-A8AA-F7C2A0C442C6}"/>
+              </a:ext>
+            </a:extLst>
+          </p:cNvPr>
+          <p:cNvSpPr>
+            <a:spLocks xmlns:a="http://schemas.openxmlformats.org/drawingml/2006/main" noGrp="1"/>
+          </p:cNvSpPr>
+          <p:nvPr/>
+        </p:nvSpPr>
+        <p:spPr>
+          <a:xfrm xmlns:a="http://schemas.openxmlformats.org/drawingml/2006/main">
+            <a:off x="4048125" y="5619750"/>
+            <a:ext cx="4095750" cy="285750"/>
+          </a:xfrm>
+          <a:prstGeom xmlns:a="http://schemas.openxmlformats.org/drawingml/2006/main" prst="rect">
+            <a:avLst/>
+          </a:prstGeom>
+          <a:noFill xmlns:a="http://schemas.openxmlformats.org/drawingml/2006/main"/>
+          <a:ln xmlns:a="http://schemas.openxmlformats.org/drawingml/2006/main" w="0">
+            <a:noFill/>
+          </a:ln>
+        </p:spPr>
+        <p:txBody>
+          <a:bodyPr xmlns:a="http://schemas.openxmlformats.org/drawingml/2006/main" lIns="0" tIns="0" rIns="0" bIns="0" anchor="t">
+            <a:noAutofit/>
+          </a:bodyPr>
+          <a:lstStyle xmlns:a="http://schemas.openxmlformats.org/drawingml/2006/main"/>
+          <a:p xmlns:a="http://schemas.openxmlformats.org/drawingml/2006/main">
+            <a:pPr>
+              <a:defRPr sz="1350" b="0">
+                <a:solidFill>
+                  <a:srgbClr val="687572"/>
+                </a:solidFill>
+                <a:latin typeface="DejaVu Sans"/>
+                <a:ea typeface="DejaVu Sans"/>
+                <a:cs typeface="DejaVu Sans"/>
+              </a:defRPr>
+            </a:pPr>
+            <a:r>
+              <a:rPr sz="1350" b="0">
+                <a:solidFill>
+                  <a:srgbClr val="687572"/>
+                </a:solidFill>
+                <a:latin typeface="DejaVu Sans"/>
+                <a:ea typeface="DejaVu Sans"/>
+                <a:cs typeface="DejaVu Sans"/>
+              </a:rPr>
+              <a:t>Add links and label the connections.</a:t>
+            </a:r>
+          </a:p>
+        </p:txBody>
+      </p:sp>
+      <p:sp>
+        <p:nvSpPr>
+          <p:cNvPr id="21" name="">
+            <a:extLst xmlns:a="http://schemas.openxmlformats.org/drawingml/2006/main">
+              <a:ext uri="{FF2B5EF4-FFF2-40B4-BE49-F238E27FC236}">
+                <a16:creationId xmlns:a16="http://schemas.microsoft.com/office/drawing/2014/main" id="{316D5736-1873-45F9-BF2A-CE12BFD22BC7}"/>
+              </a:ext>
+            </a:extLst>
+          </p:cNvPr>
+          <p:cNvSpPr>
+            <a:spLocks xmlns:a="http://schemas.openxmlformats.org/drawingml/2006/main" noGrp="1"/>
+          </p:cNvSpPr>
+          <p:nvPr/>
+        </p:nvSpPr>
+        <p:spPr>
+          <a:xfrm xmlns:a="http://schemas.openxmlformats.org/drawingml/2006/main">
+            <a:off x="609600" y="5953125"/>
+            <a:ext cx="10972800" cy="9525"/>
+          </a:xfrm>
+          <a:prstGeom xmlns:a="http://schemas.openxmlformats.org/drawingml/2006/main" prst="rect">
+            <a:avLst/>
+          </a:prstGeom>
+          <a:solidFill xmlns:a="http://schemas.openxmlformats.org/drawingml/2006/main">
+            <a:srgbClr val="A9BDB7"/>
+          </a:solidFill>
+          <a:ln xmlns:a="http://schemas.openxmlformats.org/drawingml/2006/main" w="0">
+            <a:noFill/>
+          </a:ln>
+        </p:spPr>
+      </p:sp>
+      <p:sp>
+        <p:nvSpPr>
+          <p:cNvPr id="22" name="">
+            <a:extLst xmlns:a="http://schemas.openxmlformats.org/drawingml/2006/main">
+              <a:ext uri="{FF2B5EF4-FFF2-40B4-BE49-F238E27FC236}">
+                <a16:creationId xmlns:a16="http://schemas.microsoft.com/office/drawing/2014/main" id="{DAD89455-B187-4937-B2BE-20184B310396}"/>
+              </a:ext>
+            </a:extLst>
+          </p:cNvPr>
+          <p:cNvSpPr>
+            <a:spLocks xmlns:a="http://schemas.openxmlformats.org/drawingml/2006/main" noGrp="1"/>
+          </p:cNvSpPr>
+          <p:nvPr/>
+        </p:nvSpPr>
+        <p:spPr>
+          <a:xfrm xmlns:a="http://schemas.openxmlformats.org/drawingml/2006/main">
+            <a:off x="609600" y="6191250"/>
+            <a:ext cx="3238500" cy="361950"/>
+          </a:xfrm>
+          <a:prstGeom xmlns:a="http://schemas.openxmlformats.org/drawingml/2006/main" prst="rect">
+            <a:avLst/>
+          </a:prstGeom>
+          <a:noFill xmlns:a="http://schemas.openxmlformats.org/drawingml/2006/main"/>
+          <a:ln xmlns:a="http://schemas.openxmlformats.org/drawingml/2006/main" w="0">
+            <a:noFill/>
+          </a:ln>
+        </p:spPr>
+        <p:txBody>
+          <a:bodyPr xmlns:a="http://schemas.openxmlformats.org/drawingml/2006/main" lIns="0" tIns="0" rIns="0" bIns="0" anchor="t">
+            <a:noAutofit/>
+          </a:bodyPr>
+          <a:lstStyle xmlns:a="http://schemas.openxmlformats.org/drawingml/2006/main"/>
+          <a:p xmlns:a="http://schemas.openxmlformats.org/drawingml/2006/main">
+            <a:pPr>
+              <a:defRPr sz="1650" b="0">
+                <a:solidFill>
+                  <a:srgbClr val="687572"/>
+                </a:solidFill>
+                <a:latin typeface="DejaVu Sans"/>
+                <a:ea typeface="DejaVu Sans"/>
+                <a:cs typeface="DejaVu Sans"/>
+              </a:defRPr>
+            </a:pPr>
+            <a:r>
+              <a:rPr sz="1650" b="0">
+                <a:solidFill>
+                  <a:srgbClr val="687572"/>
+                </a:solidFill>
+                <a:latin typeface="DejaVu Sans"/>
+                <a:ea typeface="DejaVu Sans"/>
+                <a:cs typeface="DejaVu Sans"/>
+              </a:rPr>
+              <a:t>Time: [Minutes]</a:t>
+            </a:r>
+          </a:p>
+        </p:txBody>
+      </p:sp>
+      <p:sp>
+        <p:nvSpPr>
+          <p:cNvPr id="23" name="">
+            <a:extLst xmlns:a="http://schemas.openxmlformats.org/drawingml/2006/main">
+              <a:ext uri="{FF2B5EF4-FFF2-40B4-BE49-F238E27FC236}">
+                <a16:creationId xmlns:a16="http://schemas.microsoft.com/office/drawing/2014/main" id="{984CEDA8-FC64-4D19-9308-1F82D713594F}"/>
+              </a:ext>
+            </a:extLst>
+          </p:cNvPr>
+          <p:cNvSpPr>
+            <a:spLocks xmlns:a="http://schemas.openxmlformats.org/drawingml/2006/main" noGrp="1"/>
+          </p:cNvSpPr>
+          <p:nvPr/>
+        </p:nvSpPr>
+        <p:spPr>
+          <a:xfrm xmlns:a="http://schemas.openxmlformats.org/drawingml/2006/main">
+            <a:off x="4286250" y="6191250"/>
+            <a:ext cx="7296150" cy="361950"/>
+          </a:xfrm>
+          <a:prstGeom xmlns:a="http://schemas.openxmlformats.org/drawingml/2006/main" prst="rect">
+            <a:avLst/>
+          </a:prstGeom>
+          <a:noFill xmlns:a="http://schemas.openxmlformats.org/drawingml/2006/main"/>
+          <a:ln xmlns:a="http://schemas.openxmlformats.org/drawingml/2006/main" w="0">
+            <a:noFill/>
+          </a:ln>
+        </p:spPr>
+        <p:txBody>
+          <a:bodyPr xmlns:a="http://schemas.openxmlformats.org/drawingml/2006/main" lIns="0" tIns="0" rIns="0" bIns="0" anchor="t">
+            <a:noAutofit/>
+          </a:bodyPr>
+          <a:lstStyle xmlns:a="http://schemas.openxmlformats.org/drawingml/2006/main"/>
+          <a:p xmlns:a="http://schemas.openxmlformats.org/drawingml/2006/main">
+            <a:pPr>
+              <a:defRPr sz="1650" b="0">
+                <a:solidFill>
+                  <a:srgbClr val="687572"/>
+                </a:solidFill>
+                <a:latin typeface="DejaVu Sans"/>
+                <a:ea typeface="DejaVu Sans"/>
+                <a:cs typeface="DejaVu Sans"/>
+              </a:defRPr>
+            </a:pPr>
+            <a:r>
+              <a:rPr sz="1650" b="0">
+                <a:solidFill>
+                  <a:srgbClr val="687572"/>
+                </a:solidFill>
+                <a:latin typeface="DejaVu Sans"/>
+                <a:ea typeface="DejaVu Sans"/>
+                <a:cs typeface="DejaVu Sans"/>
+              </a:rPr>
+              <a:t>Feedback: [Your checking routine]</a:t>
+            </a:r>
+          </a:p>
+        </p:txBody>
+      </p:sp>
     </p:spTree>
     <p:extLst>
       <p:ext uri="{BB962C8B-B14F-4D97-AF65-F5344CB8AC3E}">
-        <p14:creationId xmlns:p14="http://schemas.microsoft.com/office/powerpoint/2010/main" val="1400863701"/>
+        <p14:creationId xmlns:p14="http://schemas.microsoft.com/office/powerpoint/2010/main" val="2111776757"/>
       </p:ext>
     </p:extLst>
   </p:cSld>
